--- a/praesi/Abschlusspraesentation.pptx
+++ b/praesi/Abschlusspraesentation.pptx
@@ -2870,7 +2870,7 @@
                 <a:ea typeface="Calibri" pitchFamily="34" charset="-122"/>
                 <a:cs typeface="Calibri" pitchFamily="34" charset="-120"/>
               </a:rPr>
-              <a:t>Abschlusspräsentation · 27.10.2026 · Raum B458 (Termin bestätigen)</a:t>
+              <a:t>Abschlusspräsentation · 27.10.2026, 09:00 Uhr · Raum B458</a:t>
             </a:r>
             <a:endParaRPr lang="en-US" sz="1200" dirty="0"/>
           </a:p>
@@ -3076,7 +3076,7 @@
       </p:sp>
       <p:pic>
         <p:nvPicPr>
-          <p:cNvPr id="6" name="Image 0" descr="/home/claude/v3/FINAL/tools/pres/crop-04-mitte.png">    </p:cNvPr>
+          <p:cNvPr id="6" name="Image 0" descr="/tmp/repo/tools/pres/crop-04-mitte.png">    </p:cNvPr>
           <p:cNvPicPr>
             <a:picLocks noChangeAspect="1"/>
           </p:cNvPicPr>
@@ -3090,8 +3090,8 @@
         </p:blipFill>
         <p:spPr>
           <a:xfrm>
-            <a:off x="2271378" y="960120"/>
-            <a:ext cx="4601245" cy="2423160"/>
+            <a:off x="2215127" y="960120"/>
+            <a:ext cx="4713746" cy="2423160"/>
           </a:xfrm>
           <a:prstGeom prst="rect">
             <a:avLst/>
@@ -3195,7 +3195,7 @@
                 <a:ea typeface="Calibri" pitchFamily="34" charset="-122"/>
                 <a:cs typeface="Calibri" pitchFamily="34" charset="-120"/>
               </a:rPr>
-              <a:t>Ereignisbasiertes Gateway: Freigabe erhalten, Ablehnung erhalten oder 3 Tage keine Reaktion</a:t>
+              <a:t>Ereignisbasiertes Gateway: Freigabe erhalten, Ablehnung erhalten oder 3 Tage verstrichen (Erinnerung)</a:t>
             </a:r>
             <a:endParaRPr lang="en-US" sz="1100" dirty="0"/>
           </a:p>
@@ -4540,7 +4540,7 @@
       </p:sp>
       <p:pic>
         <p:nvPicPr>
-          <p:cNvPr id="6" name="Image 0" descr="/home/claude/v3/FINAL/tools/uml2/usecase.png">    </p:cNvPr>
+          <p:cNvPr id="6" name="Image 0" descr="/tmp/repo/tools/uml2/usecase.png">    </p:cNvPr>
           <p:cNvPicPr>
             <a:picLocks noChangeAspect="1"/>
           </p:cNvPicPr>
@@ -4554,8 +4554,8 @@
         </p:blipFill>
         <p:spPr>
           <a:xfrm>
-            <a:off x="963854" y="960120"/>
-            <a:ext cx="3924451" cy="3749040"/>
+            <a:off x="1040130" y="960120"/>
+            <a:ext cx="3771900" cy="3749040"/>
           </a:xfrm>
           <a:prstGeom prst="rect">
             <a:avLst/>
@@ -4840,7 +4840,7 @@
       </p:sp>
       <p:pic>
         <p:nvPicPr>
-          <p:cNvPr id="6" name="Image 0" descr="/home/claude/v3/FINAL/tools/uml2/klassen-fokus-1-sofortdiagnose.png">    </p:cNvPr>
+          <p:cNvPr id="6" name="Image 0" descr="/tmp/repo/tools/uml2/klassen-fokus-1-sofortdiagnose.png">    </p:cNvPr>
           <p:cNvPicPr>
             <a:picLocks noChangeAspect="1"/>
           </p:cNvPicPr>
@@ -4854,8 +4854,8 @@
         </p:blipFill>
         <p:spPr>
           <a:xfrm>
-            <a:off x="433505" y="960120"/>
-            <a:ext cx="4985150" cy="3749040"/>
+            <a:off x="863758" y="960120"/>
+            <a:ext cx="4124644" cy="3429000"/>
           </a:xfrm>
           <a:prstGeom prst="rect">
             <a:avLst/>
@@ -4870,7 +4870,7 @@
         </p:nvSpPr>
         <p:spPr>
           <a:xfrm>
-            <a:off x="365760" y="4754880"/>
+            <a:off x="365760" y="4434840"/>
             <a:ext cx="5120640" cy="274320"/>
           </a:xfrm>
           <a:prstGeom prst="rect">
@@ -4938,7 +4938,7 @@
                 <a:ea typeface="Calibri" pitchFamily="34" charset="-122"/>
                 <a:cs typeface="Calibri" pitchFamily="34" charset="-120"/>
               </a:rPr>
-              <a:t>Reparaturauftrag als Aggregatwurzel: Gerät, Befund, KVA und Reparaturschritte sind Kompositionen</a:t>
+              <a:t>Reparaturauftrag als Aggregatwurzel: Befund, KVA und Reparaturschritte sind Kompositionen, das Gerät ist nur zugeordnet</a:t>
             </a:r>
             <a:endParaRPr lang="en-US" sz="1150" dirty="0"/>
           </a:p>
@@ -5001,7 +5001,7 @@
                 <a:ea typeface="Calibri" pitchFamily="34" charset="-122"/>
                 <a:cs typeface="Calibri" pitchFamily="34" charset="-120"/>
               </a:rPr>
-              <a:t>Werkstattbetrieb als Mandant; Rollen Techniker, Disponent, Werkstattleiter als Unterklassen von Mitarbeiter – wie die Lanes im BPMN</a:t>
+              <a:t>Werkstattbetrieb als Mandant; Rollen Techniker, Disponent, Werkstattleiter als Unterklassen von Mitarbeiter – wie die Lanes Techniker, Ersatzteil-Disposition und Werkstattleitung im BPMN</a:t>
             </a:r>
             <a:endParaRPr lang="en-US" sz="1150" dirty="0"/>
           </a:p>
@@ -5179,7 +5179,7 @@
       </p:sp>
       <p:pic>
         <p:nvPicPr>
-          <p:cNvPr id="6" name="Image 0" descr="/home/claude/v3/FINAL/tools/uml2/sequenz-01-sofortdiagnose.png">    </p:cNvPr>
+          <p:cNvPr id="6" name="Image 0" descr="/tmp/repo/tools/uml2/sequenz-01-sofortdiagnose.png">    </p:cNvPr>
           <p:cNvPicPr>
             <a:picLocks noChangeAspect="1"/>
           </p:cNvPicPr>
@@ -5193,8 +5193,8 @@
         </p:blipFill>
         <p:spPr>
           <a:xfrm>
-            <a:off x="1217266" y="960120"/>
-            <a:ext cx="4149148" cy="3749040"/>
+            <a:off x="1115072" y="960120"/>
+            <a:ext cx="4353536" cy="3749040"/>
           </a:xfrm>
           <a:prstGeom prst="rect">
             <a:avLst/>
@@ -5238,7 +5238,7 @@
                 <a:ea typeface="Calibri" pitchFamily="34" charset="-122"/>
                 <a:cs typeface="Calibri" pitchFamily="34" charset="-120"/>
               </a:rPr>
-              <a:t>Voranmeldung lässt jeden Medienanhang analysieren (loop)</a:t>
+              <a:t>Voranmeldung lässt jeden Medienanhang analysieren, der KI-Diagnosedienst wertet aus (loop)</a:t>
             </a:r>
             <a:endParaRPr lang="en-US" sz="1050" dirty="0"/>
           </a:p>
@@ -5479,7 +5479,7 @@
       </p:sp>
       <p:pic>
         <p:nvPicPr>
-          <p:cNvPr id="6" name="Image 0" descr="/home/claude/v3/FINAL/tools/uml2/sequenz-03-reservierung.png">    </p:cNvPr>
+          <p:cNvPr id="6" name="Image 0" descr="/tmp/repo/tools/uml2/sequenz-03-reservierung.png">    </p:cNvPr>
           <p:cNvPicPr>
             <a:picLocks noChangeAspect="1"/>
           </p:cNvPicPr>
@@ -5493,8 +5493,8 @@
         </p:blipFill>
         <p:spPr>
           <a:xfrm>
-            <a:off x="1372932" y="960120"/>
-            <a:ext cx="3837815" cy="3749040"/>
+            <a:off x="1282539" y="960120"/>
+            <a:ext cx="4018602" cy="3749040"/>
           </a:xfrm>
           <a:prstGeom prst="rect">
             <a:avLst/>
@@ -5559,7 +5559,7 @@
                 <a:ea typeface="Calibri" pitchFamily="34" charset="-122"/>
                 <a:cs typeface="Calibri" pitchFamily="34" charset="-120"/>
               </a:rPr>
-              <a:t>Verschachteltes alt: lokal reservieren, extern reservieren mit Umlagerung oder Fehlteil melden (→ Prozess 06)</a:t>
+              <a:t>Verschachteltes alt: lokal reservieren, extern reservieren mit Umlagerung oder ref auf UC10 Lieferantenbestellung (→ Prozess 06)</a:t>
             </a:r>
             <a:endParaRPr lang="en-US" sz="1050" dirty="0"/>
           </a:p>
@@ -5580,7 +5580,7 @@
                 <a:ea typeface="Calibri" pitchFamily="34" charset="-122"/>
                 <a:cs typeface="Calibri" pitchFamily="34" charset="-120"/>
               </a:rPr>
-              <a:t>opt: Meldebestand unterschritten → Nachbestellvorschlag</a:t>
+              <a:t>opt: Meldebestand unterschritten → ref auf UC12 Nachbestellvorschlag</a:t>
             </a:r>
             <a:endParaRPr lang="en-US" sz="1050" dirty="0"/>
           </a:p>
@@ -5601,7 +5601,7 @@
                 <a:ea typeface="Calibri" pitchFamily="34" charset="-122"/>
                 <a:cs typeface="Calibri" pitchFamily="34" charset="-120"/>
               </a:rPr>
-              <a:t>Reservierung mindert den verfügbaren Bestand, entnommen wird erst beim Einbau</a:t>
+              <a:t>Reservierung erhöht nur den reservierten Bestand, abgebucht wird erst bei der Entnahme</a:t>
             </a:r>
             <a:endParaRPr lang="en-US" sz="1050" dirty="0"/>
           </a:p>
@@ -6596,7 +6596,7 @@
                 <a:ea typeface="Calibri" pitchFamily="34" charset="-122"/>
                 <a:cs typeface="Calibri" pitchFamily="34" charset="-120"/>
               </a:rPr>
-              <a:t>02.09. alle Diagramme erstellt und geprüft, 05.10. Korrekturen und Sequenzdiagramme, 15.10. Modelle, Doku und Folien fertig, 22.10. Generalprobe, 27.10. Präsentation, 13.11. Abgabe.</a:t>
+              <a:t>02.09. alle Diagramme erstellt, Prüfung im Zweierteam verteilt, 05.10. Korrekturen und Sequenzdiagramme, 15.10. Modelle, Doku und Folien fertig, 22.10. Generalprobe, 27.10. Präsentation, 13.11. Abgabe.</a:t>
             </a:r>
             <a:endParaRPr lang="en-US" sz="1150" dirty="0"/>
           </a:p>
@@ -7207,7 +7207,7 @@
                 <a:ea typeface="Calibri" pitchFamily="34" charset="-122"/>
                 <a:cs typeface="Calibri" pitchFamily="34" charset="-120"/>
               </a:rPr>
-              <a:t>Der Camunda Modeler meldet für Camunda 8 fehlende technische Details als Fehler. Wir haben die Diagramme angereichert, bis das Problems-Panel leer war.</a:t>
+              <a:t>Der Camunda Modeler meldet für Camunda 8 fehlende technische Details als Fehler. Wir haben die Diagramme angereichert, bis der Camunda-Linter (Regeln des Problems-Panels) keine Befunde mehr meldete.</a:t>
             </a:r>
             <a:endParaRPr lang="en-US" sz="1150" dirty="0"/>
           </a:p>
@@ -7588,7 +7588,7 @@
                 <a:ea typeface="Calibri" pitchFamily="34" charset="-122"/>
                 <a:cs typeface="Calibri" pitchFamily="34" charset="-120"/>
               </a:rPr>
-              <a:t>BPMN-Kollaborationsdiagramme, 120 Aktivitäten</a:t>
+              <a:t>BPMN-Kollaborationsdiagramme, 121 Aktivitäten</a:t>
             </a:r>
             <a:endParaRPr lang="en-US" sz="1100" dirty="0"/>
           </a:p>
@@ -7705,7 +7705,7 @@
                 <a:ea typeface="Calibri" pitchFamily="34" charset="-122"/>
                 <a:cs typeface="Calibri" pitchFamily="34" charset="-120"/>
               </a:rPr>
-              <a:t>23</a:t>
+              <a:t>26</a:t>
             </a:r>
             <a:endParaRPr lang="en-US" sz="4000" dirty="0"/>
           </a:p>
@@ -7744,7 +7744,7 @@
                 <a:ea typeface="Calibri" pitchFamily="34" charset="-122"/>
                 <a:cs typeface="Calibri" pitchFamily="34" charset="-120"/>
               </a:rPr>
-              <a:t>Klassen, 33 Assoziationen</a:t>
+              <a:t>Klassen, 35 Assoziationen</a:t>
             </a:r>
             <a:endParaRPr lang="en-US" sz="1100" dirty="0"/>
           </a:p>
@@ -7783,7 +7783,7 @@
                 <a:ea typeface="Calibri" pitchFamily="34" charset="-122"/>
                 <a:cs typeface="Calibri" pitchFamily="34" charset="-120"/>
               </a:rPr>
-              <a:t>5</a:t>
+              <a:t>6</a:t>
             </a:r>
             <a:endParaRPr lang="en-US" sz="4000" dirty="0"/>
           </a:p>
@@ -8471,7 +8471,7 @@
                 <a:ea typeface="Calibri" pitchFamily="34" charset="-122"/>
                 <a:cs typeface="Calibri" pitchFamily="34" charset="-120"/>
               </a:rPr>
-              <a:t>Nina, David</a:t>
+              <a:t>David</a:t>
             </a:r>
             <a:endParaRPr lang="en-US" sz="1200" dirty="0"/>
           </a:p>
@@ -9039,7 +9039,7 @@
                 <a:ea typeface="Calibri" pitchFamily="34" charset="-122"/>
                 <a:cs typeface="Calibri" pitchFamily="34" charset="-120"/>
               </a:rPr>
-              <a:t>Kilian</a:t>
+              <a:t>Kilian, Jakob</a:t>
             </a:r>
             <a:endParaRPr lang="en-US" sz="1200" dirty="0"/>
           </a:p>
@@ -12057,7 +12057,7 @@
       </p:sp>
       <p:pic>
         <p:nvPicPr>
-          <p:cNvPr id="7" name="Image 0" descr="/home/claude/v3/FINAL/tools/uml2/systemkontext.png">    </p:cNvPr>
+          <p:cNvPr id="7" name="Image 0" descr="/tmp/repo/tools/uml2/systemkontext.png">    </p:cNvPr>
           <p:cNvPicPr>
             <a:picLocks noChangeAspect="1"/>
           </p:cNvPicPr>
@@ -12919,7 +12919,7 @@
       </p:sp>
       <p:pic>
         <p:nvPicPr>
-          <p:cNvPr id="6" name="Image 0" descr="/home/claude/v3/FINAL/tools/uml2/zustand-reparaturauftrag.png">    </p:cNvPr>
+          <p:cNvPr id="6" name="Image 0" descr="/tmp/repo/tools/uml2/zustand-reparaturauftrag.png">    </p:cNvPr>
           <p:cNvPicPr>
             <a:picLocks noChangeAspect="1"/>
           </p:cNvPicPr>
@@ -12933,8 +12933,8 @@
         </p:blipFill>
         <p:spPr>
           <a:xfrm>
-            <a:off x="806494" y="960120"/>
-            <a:ext cx="3141892" cy="3657600"/>
+            <a:off x="1250866" y="960120"/>
+            <a:ext cx="2253147" cy="3657600"/>
           </a:xfrm>
           <a:prstGeom prst="rect">
             <a:avLst/>
@@ -13041,7 +13041,7 @@
                 <a:ea typeface="Calibri" pitchFamily="34" charset="-122"/>
                 <a:cs typeface="Calibri" pitchFamily="34" charset="-120"/>
               </a:rPr>
-              <a:t>Die Sequenzdiagramme markieren jeden Statuswechsel.</a:t>
+              <a:t>Die Sequenzdiagramme markieren die Statuswechsel, an denen sie beteiligt sind.</a:t>
             </a:r>
             <a:endParaRPr lang="en-US" sz="1300" dirty="0"/>
           </a:p>
@@ -16090,7 +16090,7 @@
                           <a:ea typeface="Calibri" pitchFamily="34" charset="-122"/>
                           <a:cs typeface="Calibri" pitchFamily="34" charset="-120"/>
                         </a:rPr>
-                        <a:t>12</a:t>
+                        <a:t>13</a:t>
                       </a:r>
                       <a:endParaRPr lang="en-US" sz="950" dirty="0">
                         <a:latin typeface="Calibri" charset="0"/>
@@ -16155,7 +16155,7 @@
                           <a:ea typeface="Calibri" pitchFamily="34" charset="-122"/>
                           <a:cs typeface="Calibri" pitchFamily="34" charset="-120"/>
                         </a:rPr>
-                        <a:t>67 %</a:t>
+                        <a:t>69 %</a:t>
                       </a:r>
                       <a:endParaRPr lang="en-US" sz="950" dirty="0">
                         <a:latin typeface="Calibri" charset="0"/>
@@ -16417,7 +16417,7 @@
                           <a:ea typeface="Calibri" pitchFamily="34" charset="-122"/>
                           <a:cs typeface="Calibri" pitchFamily="34" charset="-120"/>
                         </a:rPr>
-                        <a:t>13</a:t>
+                        <a:t>14</a:t>
                       </a:r>
                       <a:endParaRPr lang="en-US" sz="950" dirty="0">
                         <a:latin typeface="Calibri" charset="0"/>
@@ -16482,7 +16482,7 @@
                           <a:ea typeface="Calibri" pitchFamily="34" charset="-122"/>
                           <a:cs typeface="Calibri" pitchFamily="34" charset="-120"/>
                         </a:rPr>
-                        <a:t>54 %</a:t>
+                        <a:t>57 %</a:t>
                       </a:r>
                       <a:endParaRPr lang="en-US" sz="950" dirty="0">
                         <a:latin typeface="Calibri" charset="0"/>
@@ -16744,7 +16744,7 @@
                           <a:ea typeface="Calibri" pitchFamily="34" charset="-122"/>
                           <a:cs typeface="Calibri" pitchFamily="34" charset="-120"/>
                         </a:rPr>
-                        <a:t>11</a:t>
+                        <a:t>10</a:t>
                       </a:r>
                       <a:endParaRPr lang="en-US" sz="950" dirty="0">
                         <a:latin typeface="Calibri" charset="0"/>
@@ -16809,7 +16809,7 @@
                           <a:ea typeface="Calibri" pitchFamily="34" charset="-122"/>
                           <a:cs typeface="Calibri" pitchFamily="34" charset="-120"/>
                         </a:rPr>
-                        <a:t>55 %</a:t>
+                        <a:t>60 %</a:t>
                       </a:r>
                       <a:endParaRPr lang="en-US" sz="950" dirty="0">
                         <a:latin typeface="Calibri" charset="0"/>
@@ -16895,7 +16895,7 @@
                 <a:ea typeface="Calibri" pitchFamily="34" charset="-122"/>
                 <a:cs typeface="Calibri" pitchFamily="34" charset="-120"/>
               </a:rPr>
-              <a:t>120</a:t>
+              <a:t>121</a:t>
             </a:r>
             <a:endParaRPr lang="en-US" sz="4000" dirty="0"/>
           </a:p>
@@ -16934,7 +16934,7 @@
                 <a:ea typeface="Calibri" pitchFamily="34" charset="-122"/>
                 <a:cs typeface="Calibri" pitchFamily="34" charset="-120"/>
               </a:rPr>
-              <a:t>Aktivitäten, im Schnitt 12 je Diagramm</a:t>
+              <a:t>Aktivitäten, im Schnitt 12,1 je Diagramm</a:t>
             </a:r>
             <a:endParaRPr lang="en-US" sz="1100" dirty="0"/>
           </a:p>
@@ -16973,7 +16973,7 @@
                 <a:ea typeface="Calibri" pitchFamily="34" charset="-122"/>
                 <a:cs typeface="Calibri" pitchFamily="34" charset="-120"/>
               </a:rPr>
-              <a:t>60 %</a:t>
+              <a:t>61 %</a:t>
             </a:r>
             <a:endParaRPr lang="en-US" sz="4000" dirty="0"/>
           </a:p>
@@ -17816,7 +17816,7 @@
                 <a:ea typeface="Calibri" pitchFamily="34" charset="-122"/>
                 <a:cs typeface="Calibri" pitchFamily="34" charset="-120"/>
               </a:rPr>
-              <a:t>Je Diagramm ein Start- und ein Endereignis. Camunda-8-Anreicherung: Task-Definitionen, Subscriptions, Timer, FEEL-Bedingungen. Problems-Panel: 0 Befunde.</a:t>
+              <a:t>Je Prozess ein Start- und ein Endereignis. Camunda-8-Anreicherung: Task-Definitionen, Subscriptions, Timer, FEEL-Bedingungen. Camunda-Linter: 0 Befunde.</a:t>
             </a:r>
             <a:endParaRPr lang="en-US" sz="1150" dirty="0"/>
           </a:p>
@@ -17824,7 +17824,7 @@
       </p:sp>
       <p:pic>
         <p:nvPicPr>
-          <p:cNvPr id="26" name="Image 4" descr="/home/claude/v3/FINAL/tools/pres/crop-05-links.png">    </p:cNvPr>
+          <p:cNvPr id="26" name="Image 4" descr="/tmp/repo/tools/pres/crop-05-links.png">    </p:cNvPr>
           <p:cNvPicPr>
             <a:picLocks noChangeAspect="1"/>
           </p:cNvPicPr>
@@ -17838,8 +17838,8 @@
         </p:blipFill>
         <p:spPr>
           <a:xfrm>
-            <a:off x="3515207" y="3794760"/>
-            <a:ext cx="2113587" cy="713232"/>
+            <a:off x="3066497" y="3794760"/>
+            <a:ext cx="3011006" cy="713232"/>
           </a:xfrm>
           <a:prstGeom prst="rect">
             <a:avLst/>
@@ -18036,7 +18036,7 @@
       </p:sp>
       <p:pic>
         <p:nvPicPr>
-          <p:cNvPr id="6" name="Image 0" descr="/home/claude/v3/FINAL/tools/pres/crop-01-links.png">    </p:cNvPr>
+          <p:cNvPr id="6" name="Image 0" descr="/tmp/repo/tools/pres/crop-01-links.png">    </p:cNvPr>
           <p:cNvPicPr>
             <a:picLocks noChangeAspect="1"/>
           </p:cNvPicPr>
@@ -18050,8 +18050,8 @@
         </p:blipFill>
         <p:spPr>
           <a:xfrm>
-            <a:off x="2379095" y="960120"/>
-            <a:ext cx="4385809" cy="2468880"/>
+            <a:off x="2533709" y="960120"/>
+            <a:ext cx="4076582" cy="2468880"/>
           </a:xfrm>
           <a:prstGeom prst="rect">
             <a:avLst/>

--- a/praesi/Abschlusspraesentation.pptx
+++ b/praesi/Abschlusspraesentation.pptx
@@ -2116,7 +2116,7 @@
             <a:r>
               <a:rPr lang="en-US" dirty="0"/>
               <a:t>Vortragende(r): Maxi
-Regeln aus der Vorlesung: Pool = Unternehmen, Lane = Rolle, keine Lane für Software. Automatisierung zeigt der Aktivitätstyp.</a:t>
+Regeln aus der Vorlesung: Pool = Unternehmen, Lane = Rolle, keine Lane für Software. Automatisierung zeigt der Aktivitätstyp. Der Kunde hat einen eigenen, nicht ausführbaren Ablauf (z. B. Foto aufnehmen, Anfrage senden, KVA freigeben), der Lieferant bleibt Black Box.</a:t>
             </a:r>
             <a:endParaRPr lang="en-US" dirty="0"/>
           </a:p>
@@ -3076,7 +3076,7 @@
       </p:sp>
       <p:pic>
         <p:nvPicPr>
-          <p:cNvPr id="6" name="Image 0" descr="/tmp/repo/tools/pres/crop-04-mitte.png">    </p:cNvPr>
+          <p:cNvPr id="6" name="Image 0" descr="/tmp/claude-0/-home-claude/3b43456e-f09e-5adb-b78c-d3b2ad830e83/scratchpad/build/pres/crop-04-mitte.png">    </p:cNvPr>
           <p:cNvPicPr>
             <a:picLocks noChangeAspect="1"/>
           </p:cNvPicPr>
@@ -3090,8 +3090,8 @@
         </p:blipFill>
         <p:spPr>
           <a:xfrm>
-            <a:off x="2215127" y="960120"/>
-            <a:ext cx="4713746" cy="2423160"/>
+            <a:off x="1808596" y="960120"/>
+            <a:ext cx="5526808" cy="2423160"/>
           </a:xfrm>
           <a:prstGeom prst="rect">
             <a:avLst/>
@@ -3131,7 +3131,7 @@
                 <a:ea typeface="Calibri" pitchFamily="34" charset="-122"/>
                 <a:cs typeface="Calibri" pitchFamily="34" charset="-120"/>
               </a:rPr>
-              <a:t>Mittlerer Teil: Senden, ereignisbasiertes Gateway mit Freigabe, Ablehnung und Timer, Erinnerungsschleife</a:t>
+              <a:t>Ausschnitt Pool Kunde und Lane Service / Annahme: Kunde prüft und entscheidet, ereignisbasiertes Gateway mit Freigabe, Ablehnung und Timer, Erinnerungsschleife</a:t>
             </a:r>
             <a:endParaRPr lang="en-US" sz="900" dirty="0"/>
           </a:p>
@@ -4540,7 +4540,7 @@
       </p:sp>
       <p:pic>
         <p:nvPicPr>
-          <p:cNvPr id="6" name="Image 0" descr="/tmp/repo/tools/uml2/usecase.png">    </p:cNvPr>
+          <p:cNvPr id="6" name="Image 0" descr="/tmp/claude-0/-home-claude/3b43456e-f09e-5adb-b78c-d3b2ad830e83/scratchpad/build/uml2/usecase.png">    </p:cNvPr>
           <p:cNvPicPr>
             <a:picLocks noChangeAspect="1"/>
           </p:cNvPicPr>
@@ -4840,7 +4840,7 @@
       </p:sp>
       <p:pic>
         <p:nvPicPr>
-          <p:cNvPr id="6" name="Image 0" descr="/tmp/repo/tools/uml2/klassen-fokus-1-sofortdiagnose.png">    </p:cNvPr>
+          <p:cNvPr id="6" name="Image 0" descr="/tmp/claude-0/-home-claude/3b43456e-f09e-5adb-b78c-d3b2ad830e83/scratchpad/build/uml2/klassen-fokus-1-sofortdiagnose.png">    </p:cNvPr>
           <p:cNvPicPr>
             <a:picLocks noChangeAspect="1"/>
           </p:cNvPicPr>
@@ -5179,7 +5179,7 @@
       </p:sp>
       <p:pic>
         <p:nvPicPr>
-          <p:cNvPr id="6" name="Image 0" descr="/tmp/repo/tools/uml2/sequenz-01-sofortdiagnose.png">    </p:cNvPr>
+          <p:cNvPr id="6" name="Image 0" descr="/tmp/claude-0/-home-claude/3b43456e-f09e-5adb-b78c-d3b2ad830e83/scratchpad/build/uml2/sequenz-01-sofortdiagnose.png">    </p:cNvPr>
           <p:cNvPicPr>
             <a:picLocks noChangeAspect="1"/>
           </p:cNvPicPr>
@@ -5479,7 +5479,7 @@
       </p:sp>
       <p:pic>
         <p:nvPicPr>
-          <p:cNvPr id="6" name="Image 0" descr="/tmp/repo/tools/uml2/sequenz-03-reservierung.png">    </p:cNvPr>
+          <p:cNvPr id="6" name="Image 0" descr="/tmp/claude-0/-home-claude/3b43456e-f09e-5adb-b78c-d3b2ad830e83/scratchpad/build/uml2/sequenz-03-reservierung.png">    </p:cNvPr>
           <p:cNvPicPr>
             <a:picLocks noChangeAspect="1"/>
           </p:cNvPicPr>
@@ -12057,7 +12057,7 @@
       </p:sp>
       <p:pic>
         <p:nvPicPr>
-          <p:cNvPr id="7" name="Image 0" descr="/tmp/repo/tools/uml2/systemkontext.png">    </p:cNvPr>
+          <p:cNvPr id="7" name="Image 0" descr="/tmp/claude-0/-home-claude/3b43456e-f09e-5adb-b78c-d3b2ad830e83/scratchpad/build/uml2/systemkontext.png">    </p:cNvPr>
           <p:cNvPicPr>
             <a:picLocks noChangeAspect="1"/>
           </p:cNvPicPr>
@@ -12919,7 +12919,7 @@
       </p:sp>
       <p:pic>
         <p:nvPicPr>
-          <p:cNvPr id="6" name="Image 0" descr="/tmp/repo/tools/uml2/zustand-reparaturauftrag.png">    </p:cNvPr>
+          <p:cNvPr id="6" name="Image 0" descr="/tmp/claude-0/-home-claude/3b43456e-f09e-5adb-b78c-d3b2ad830e83/scratchpad/build/uml2/zustand-reparaturauftrag.png">    </p:cNvPr>
           <p:cNvPicPr>
             <a:picLocks noChangeAspect="1"/>
           </p:cNvPicPr>
@@ -16934,7 +16934,7 @@
                 <a:ea typeface="Calibri" pitchFamily="34" charset="-122"/>
                 <a:cs typeface="Calibri" pitchFamily="34" charset="-120"/>
               </a:rPr>
-              <a:t>Aktivitäten, im Schnitt 12,1 je Diagramm</a:t>
+              <a:t>Aktivitäten im Werkstatt-Pool, im Schnitt 12,1 je Diagramm</a:t>
             </a:r>
             <a:endParaRPr lang="en-US" sz="1100" dirty="0"/>
           </a:p>
@@ -17354,7 +17354,7 @@
                 <a:ea typeface="Calibri" pitchFamily="34" charset="-122"/>
                 <a:cs typeface="Calibri" pitchFamily="34" charset="-120"/>
               </a:rPr>
-              <a:t>Pool = Unternehmen: Werkstattbetrieb (Mandant), Kunde und Lieferant als Empty Pools. Lanes = Rollen: Service, Techniker, Werkstattleitung, Disposition.</a:t>
+              <a:t>Pool = Unternehmen: Werkstattbetrieb (Mandant), Kunde mit eigenem Ablauf, Lieferant als Black Box. Lanes = Rollen: Service, Techniker, Werkstattleitung, Disposition.</a:t>
             </a:r>
             <a:endParaRPr lang="en-US" sz="1150" dirty="0"/>
           </a:p>
@@ -17824,7 +17824,7 @@
       </p:sp>
       <p:pic>
         <p:nvPicPr>
-          <p:cNvPr id="26" name="Image 4" descr="/tmp/repo/tools/pres/crop-05-links.png">    </p:cNvPr>
+          <p:cNvPr id="26" name="Image 4" descr="/tmp/claude-0/-home-claude/3b43456e-f09e-5adb-b78c-d3b2ad830e83/scratchpad/build/pres/crop-05-links.png">    </p:cNvPr>
           <p:cNvPicPr>
             <a:picLocks noChangeAspect="1"/>
           </p:cNvPicPr>
@@ -18036,7 +18036,7 @@
       </p:sp>
       <p:pic>
         <p:nvPicPr>
-          <p:cNvPr id="6" name="Image 0" descr="/tmp/repo/tools/pres/crop-01-links.png">    </p:cNvPr>
+          <p:cNvPr id="6" name="Image 0" descr="/tmp/claude-0/-home-claude/3b43456e-f09e-5adb-b78c-d3b2ad830e83/scratchpad/build/pres/crop-01-links.png">    </p:cNvPr>
           <p:cNvPicPr>
             <a:picLocks noChangeAspect="1"/>
           </p:cNvPicPr>
@@ -18050,8 +18050,8 @@
         </p:blipFill>
         <p:spPr>
           <a:xfrm>
-            <a:off x="2533709" y="960120"/>
-            <a:ext cx="4076582" cy="2468880"/>
+            <a:off x="1579418" y="960120"/>
+            <a:ext cx="5985164" cy="2468880"/>
           </a:xfrm>
           <a:prstGeom prst="rect">
             <a:avLst/>
@@ -18091,7 +18091,7 @@
                 <a:ea typeface="Calibri" pitchFamily="34" charset="-122"/>
                 <a:cs typeface="Calibri" pitchFamily="34" charset="-120"/>
               </a:rPr>
-              <a:t>Linker Teil des Diagramms: Anfrage, Medienprüfung mit Rückfrage, KI-Diagnosevorschlag, Vorab-KVA, Verfügbarkeit</a:t>
+              <a:t>Ausschnitt Pool Kunde und Lane Service / Annahme: Aufnahme und Anfrage, Medienprüfung mit Rückfrage an den Kunden, KI-Diagnosevorschlag, Vorab-KVA</a:t>
             </a:r>
             <a:endParaRPr lang="en-US" sz="900" dirty="0"/>
           </a:p>
@@ -18134,7 +18134,7 @@
                 <a:ea typeface="Calibri" pitchFamily="34" charset="-122"/>
                 <a:cs typeface="Calibri" pitchFamily="34" charset="-120"/>
               </a:rPr>
-              <a:t>Auslöser: Nachricht aus der App mit Foto, Video oder Ton</a:t>
+              <a:t>Kunde: Foto, Video oder Ton aufnehmen und in der App senden; Auslöser für die Werkstatt ist diese Nachricht</a:t>
             </a:r>
             <a:endParaRPr lang="en-US" sz="1100" dirty="0"/>
           </a:p>

--- a/praesi/Abschlusspraesentation.pptx
+++ b/praesi/Abschlusspraesentation.pptx
@@ -610,7 +610,7 @@
             <a:r>
               <a:rPr lang="en-US" dirty="0"/>
               <a:t>Vortragende(r): Maxi
-Ereignisbasiertes Gateway: Freigabe, Ablehnung oder Timer. Die Erinnerung protokollieren und den KVA erneut senden statt einer separaten Nachricht, damit das Diagramm ohne Kreuzungen bleibt.</a:t>
+Ereignisbasiertes Gateway: Freigabe, Ablehnung oder Timer. Die Erinnerung protokollieren und den KVA erneut senden; nach der dritten Erinnerung gilt der KVA als abgelehnt. Abgelehnte Aufträge gehen über Prozess 08 mit Diagnosepauschale zur Abholung.</a:t>
             </a:r>
             <a:endParaRPr lang="en-US" dirty="0"/>
           </a:p>
@@ -788,7 +788,7 @@
             <a:r>
               <a:rPr lang="en-US" dirty="0"/>
               <a:t>Vortragende(r): Kilian
-18 Use Cases in vier Bereichen, sieben Akteure. include = immer, extend = bedingt.</a:t>
+19 Use Cases in vier Bereichen, acht Akteure (je Lane ein Akteur). include = immer, extend = bedingt.</a:t>
             </a:r>
             <a:endParaRPr lang="en-US" dirty="0"/>
           </a:p>
@@ -966,7 +966,7 @@
             <a:r>
               <a:rPr lang="en-US" dirty="0"/>
               <a:t>Vortragende(r): Kilian
-Lebenslinien sind Klassen, Botschaften sind Operationen. Fragmente: loop je Medienanhang, alt auswertbar/nicht, loop je Teil und Filiale, alt Bestätigung/Timer, opt Reservierung.</a:t>
+Lebenslinien sind Klassen, Botschaften sind Operationen. Fragmente: loop je Medienanhang, alt auswertbar/nicht, loop je Teil und Filiale, alt Bestätigung/Timer, opt Vorreservierung. Die Voranmeldung entsteht wie in Prozess 01 direkt mit der Anfrage.</a:t>
             </a:r>
             <a:endParaRPr lang="en-US" dirty="0"/>
           </a:p>
@@ -1407,7 +1407,7 @@
           <a:p>
             <a:r>
               <a:rPr lang="en-US" dirty="0"/>
-              <a:t>Vortragende(r): alle</a:t>
+              <a:t>Vortragende(r): Nina</a:t>
             </a:r>
             <a:endParaRPr lang="en-US" dirty="0"/>
           </a:p>
@@ -2205,7 +2205,7 @@
             <a:r>
               <a:rPr lang="en-US" dirty="0"/>
               <a:t>Vortragende(r): Maxi
-Message-Start aus der App, Medienprüfung mit Rückfrageschleife, KI als Business Rule Task, Vorab-KVA, Verfügbarkeit über alle Filialen, Terminvorschlag, ereignisbasiertes Gateway: Bestätigung oder 7-Tage-Timer.</a:t>
+Message-Start aus der App, Voranmeldung wird sofort angelegt, Medienprüfung mit Rückfrage (Antwort oder 7-Tage-Timer), KI als Business Rule Task, Vorab-KVA, Verfügbarkeit über alle Filialen, Terminvorschlag, ereignisbasiertes Gateway: Bestätigung, Ablehnung oder 7-Tage-Timer.</a:t>
             </a:r>
             <a:endParaRPr lang="en-US" dirty="0"/>
           </a:p>
@@ -3090,8 +3090,8 @@
         </p:blipFill>
         <p:spPr>
           <a:xfrm>
-            <a:off x="1808596" y="960120"/>
-            <a:ext cx="5526808" cy="2423160"/>
+            <a:off x="1697978" y="960120"/>
+            <a:ext cx="5748044" cy="2423160"/>
           </a:xfrm>
           <a:prstGeom prst="rect">
             <a:avLst/>
@@ -3131,7 +3131,7 @@
                 <a:ea typeface="Calibri" pitchFamily="34" charset="-122"/>
                 <a:cs typeface="Calibri" pitchFamily="34" charset="-120"/>
               </a:rPr>
-              <a:t>Ausschnitt Pool Kunde und Lane Service / Annahme: Kunde prüft und entscheidet, ereignisbasiertes Gateway mit Freigabe, Ablehnung und Timer, Erinnerungsschleife</a:t>
+              <a:t>Ausschnitt Pool Kunde und Lane Service / Annahme: Kunde prüft und entscheidet, ereignisbasiertes Gateway mit Freigabe, Ablehnung und Timer, Erinnerungsschleife mit Ausstieg nach der dritten Erinnerung</a:t>
             </a:r>
             <a:endParaRPr lang="en-US" sz="900" dirty="0"/>
           </a:p>
@@ -3195,7 +3195,7 @@
                 <a:ea typeface="Calibri" pitchFamily="34" charset="-122"/>
                 <a:cs typeface="Calibri" pitchFamily="34" charset="-120"/>
               </a:rPr>
-              <a:t>Ereignisbasiertes Gateway: Freigabe erhalten, Ablehnung erhalten oder 3 Tage verstrichen (Erinnerung)</a:t>
+              <a:t>Ereignisbasiertes Gateway: Freigabe erhalten, Ablehnung erhalten oder 3 Tage verstrichen (Erinnerung, höchstens dreimal)</a:t>
             </a:r>
             <a:endParaRPr lang="en-US" sz="1100" dirty="0"/>
           </a:p>
@@ -3216,7 +3216,7 @@
                 <a:ea typeface="Calibri" pitchFamily="34" charset="-122"/>
                 <a:cs typeface="Calibri" pitchFamily="34" charset="-120"/>
               </a:rPr>
-              <a:t>Freigabe ruft Prozess 05 (Ersatzteile disponieren) als Call Activity auf; Ablehnung führt zur Diagnosepauschale und Abholaufforderung</a:t>
+              <a:t>Freigabe ruft Prozess 05 (Ersatzteile disponieren) auf; Ablehnung setzt den Auftrag auf „abgelehnt" und ruft Prozess 08 (Abholung mit Diagnosepauschale) auf</a:t>
             </a:r>
             <a:endParaRPr lang="en-US" sz="1100" dirty="0"/>
           </a:p>
@@ -4554,8 +4554,8 @@
         </p:blipFill>
         <p:spPr>
           <a:xfrm>
-            <a:off x="1040130" y="960120"/>
-            <a:ext cx="3771900" cy="3749040"/>
+            <a:off x="1433731" y="960120"/>
+            <a:ext cx="2984699" cy="3749040"/>
           </a:xfrm>
           <a:prstGeom prst="rect">
             <a:avLst/>
@@ -4599,7 +4599,7 @@
                 <a:ea typeface="Calibri" pitchFamily="34" charset="-122"/>
                 <a:cs typeface="Calibri" pitchFamily="34" charset="-120"/>
               </a:rPr>
-              <a:t>18 Use Cases in vier Bereichen: Kundenportal, Auftrag und Werkstatt, Ersatzteil-Disposition, Administration</a:t>
+              <a:t>19 Use Cases in vier Bereichen: Kundenportal, Auftrag und Werkstatt, Ersatzteil-Disposition, Administration</a:t>
             </a:r>
             <a:endParaRPr lang="en-US" sz="1150" dirty="0"/>
           </a:p>
@@ -4620,7 +4620,7 @@
                 <a:ea typeface="Calibri" pitchFamily="34" charset="-122"/>
                 <a:cs typeface="Calibri" pitchFamily="34" charset="-120"/>
               </a:rPr>
-              <a:t>Primäre Akteure: Kunde, Techniker, Disponent, Werkstattleiter, Werkstattinhaber</a:t>
+              <a:t>Primäre Akteure: Kunde, Servicemitarbeiter, Techniker, Disponent, Werkstattleiter, Werkstattinhaber</a:t>
             </a:r>
             <a:endParaRPr lang="en-US" sz="1150" dirty="0"/>
           </a:p>
@@ -4662,7 +4662,7 @@
                 <a:ea typeface="Calibri" pitchFamily="34" charset="-122"/>
                 <a:cs typeface="Calibri" pitchFamily="34" charset="-120"/>
               </a:rPr>
-              <a:t>«include» für Pflicht-Teilschritte, z. B. KVA erstellen → Diagnosebefund erfassen</a:t>
+              <a:t>«include» für Pflicht-Teilschritte, z. B. Ersatzteil reservieren → Ersatzteil-Verfügbarkeit prüfen</a:t>
             </a:r>
             <a:endParaRPr lang="en-US" sz="1150" dirty="0"/>
           </a:p>
@@ -4754,7 +4754,7 @@
                 <a:ea typeface="Calibri" pitchFamily="34" charset="-122"/>
                 <a:cs typeface="Calibri" pitchFamily="34" charset="-120"/>
               </a:rPr>
-              <a:t>Klassendiagramm: 26 Klassen, ein Zustandsautomat</a:t>
+              <a:t>Klassendiagramm: 27 Klassen, ein Zustandsautomat</a:t>
             </a:r>
             <a:endParaRPr lang="en-US" sz="2800" dirty="0"/>
           </a:p>
@@ -4854,8 +4854,8 @@
         </p:blipFill>
         <p:spPr>
           <a:xfrm>
-            <a:off x="863758" y="960120"/>
-            <a:ext cx="4124644" cy="3429000"/>
+            <a:off x="932475" y="960120"/>
+            <a:ext cx="3987209" cy="3429000"/>
           </a:xfrm>
           <a:prstGeom prst="rect">
             <a:avLst/>
@@ -4895,7 +4895,7 @@
                 <a:ea typeface="Calibri" pitchFamily="34" charset="-122"/>
                 <a:cs typeface="Calibri" pitchFamily="34" charset="-120"/>
               </a:rPr>
-              <a:t>Ausschnitt: Kundenkontakt und KI-Sofortdiagnose (vollständiges Diagramm in der Dokumentation)</a:t>
+              <a:t>Ausschnitt: Kundenkontakt und KI-Sofortdiagnose (vollständiges Diagramm in Anhang C der Dokumentation)</a:t>
             </a:r>
             <a:endParaRPr lang="en-US" sz="900" dirty="0"/>
           </a:p>
@@ -4938,7 +4938,7 @@
                 <a:ea typeface="Calibri" pitchFamily="34" charset="-122"/>
                 <a:cs typeface="Calibri" pitchFamily="34" charset="-120"/>
               </a:rPr>
-              <a:t>Reparaturauftrag als Aggregatwurzel: Befund, KVA und Reparaturschritte sind Kompositionen, das Gerät ist nur zugeordnet</a:t>
+              <a:t>Reparaturauftrag als Aggregatwurzel: Befund und Reparaturschritte sind Kompositionen; KVA und Gerät sind nur zugeordnet (Vorab-KVA entsteht vor dem Auftrag)</a:t>
             </a:r>
             <a:endParaRPr lang="en-US" sz="1150" dirty="0"/>
           </a:p>
@@ -5001,7 +5001,7 @@
                 <a:ea typeface="Calibri" pitchFamily="34" charset="-122"/>
                 <a:cs typeface="Calibri" pitchFamily="34" charset="-120"/>
               </a:rPr>
-              <a:t>Werkstattbetrieb als Mandant; Rollen Techniker, Disponent, Werkstattleiter als Unterklassen von Mitarbeiter – wie die Lanes Techniker, Ersatzteil-Disposition und Werkstattleitung im BPMN</a:t>
+              <a:t>Werkstattbetrieb als Mandant; Rollen Servicemitarbeiter, Techniker, Disponent, Werkstattleiter als Unterklassen von Mitarbeiter – wie die vier Lanes im BPMN</a:t>
             </a:r>
             <a:endParaRPr lang="en-US" sz="1150" dirty="0"/>
           </a:p>
@@ -5193,8 +5193,8 @@
         </p:blipFill>
         <p:spPr>
           <a:xfrm>
-            <a:off x="1115072" y="960120"/>
-            <a:ext cx="4353536" cy="3749040"/>
+            <a:off x="1293292" y="960120"/>
+            <a:ext cx="3997097" cy="3749040"/>
           </a:xfrm>
           <a:prstGeom prst="rect">
             <a:avLst/>
@@ -5493,8 +5493,8 @@
         </p:blipFill>
         <p:spPr>
           <a:xfrm>
-            <a:off x="1282539" y="960120"/>
-            <a:ext cx="4018602" cy="3749040"/>
+            <a:off x="1424979" y="960120"/>
+            <a:ext cx="3733722" cy="3749040"/>
           </a:xfrm>
           <a:prstGeom prst="rect">
             <a:avLst/>
@@ -7588,7 +7588,7 @@
                 <a:ea typeface="Calibri" pitchFamily="34" charset="-122"/>
                 <a:cs typeface="Calibri" pitchFamily="34" charset="-120"/>
               </a:rPr>
-              <a:t>BPMN-Kollaborationsdiagramme, 121 Aktivitäten</a:t>
+              <a:t>BPMN-Kollaborationsdiagramme, 125 Aktivitäten</a:t>
             </a:r>
             <a:endParaRPr lang="en-US" sz="1100" dirty="0"/>
           </a:p>
@@ -7627,7 +7627,7 @@
                 <a:ea typeface="Calibri" pitchFamily="34" charset="-122"/>
                 <a:cs typeface="Calibri" pitchFamily="34" charset="-120"/>
               </a:rPr>
-              <a:t>18</a:t>
+              <a:t>19</a:t>
             </a:r>
             <a:endParaRPr lang="en-US" sz="4000" dirty="0"/>
           </a:p>
@@ -7666,7 +7666,7 @@
                 <a:ea typeface="Calibri" pitchFamily="34" charset="-122"/>
                 <a:cs typeface="Calibri" pitchFamily="34" charset="-120"/>
               </a:rPr>
-              <a:t>Use Cases, 7 Akteure</a:t>
+              <a:t>Use Cases, 8 Akteure</a:t>
             </a:r>
             <a:endParaRPr lang="en-US" sz="1100" dirty="0"/>
           </a:p>
@@ -7705,7 +7705,7 @@
                 <a:ea typeface="Calibri" pitchFamily="34" charset="-122"/>
                 <a:cs typeface="Calibri" pitchFamily="34" charset="-120"/>
               </a:rPr>
-              <a:t>26</a:t>
+              <a:t>27</a:t>
             </a:r>
             <a:endParaRPr lang="en-US" sz="4000" dirty="0"/>
           </a:p>
@@ -7744,7 +7744,7 @@
                 <a:ea typeface="Calibri" pitchFamily="34" charset="-122"/>
                 <a:cs typeface="Calibri" pitchFamily="34" charset="-120"/>
               </a:rPr>
-              <a:t>Klassen, 35 Assoziationen</a:t>
+              <a:t>Klassen, 36 Assoziationen</a:t>
             </a:r>
             <a:endParaRPr lang="en-US" sz="1100" dirty="0"/>
           </a:p>
@@ -8858,7 +8858,7 @@
                 <a:ea typeface="Calibri" pitchFamily="34" charset="-122"/>
                 <a:cs typeface="Calibri" pitchFamily="34" charset="-120"/>
               </a:rPr>
-              <a:t>Automatisierung und KI-Sofortdiagnose</a:t>
+              <a:t>KI-Sofortdiagnose als Alleinstellungsmerkmal</a:t>
             </a:r>
             <a:endParaRPr lang="en-US" sz="1600" dirty="0"/>
           </a:p>
@@ -9898,7 +9898,7 @@
                           <a:ea typeface="Calibri" pitchFamily="34" charset="-122"/>
                           <a:cs typeface="Calibri" pitchFamily="34" charset="-120"/>
                         </a:rPr>
-                        <a:t>Einleitung und Agenda, Fazit und Ausblick; Projektleitung</a:t>
+                        <a:t>Einleitung und Agenda, Fazit und Ausblick, Moderation der Fragerunde; Projektleitung</a:t>
                       </a:r>
                       <a:endParaRPr lang="en-US" sz="1100" dirty="0">
                         <a:latin typeface="Calibri" charset="0"/>
@@ -12072,7 +12072,7 @@
         <p:spPr>
           <a:xfrm>
             <a:off x="4572000" y="1051560"/>
-            <a:ext cx="4114800" cy="1916696"/>
+            <a:ext cx="4114800" cy="2656347"/>
           </a:xfrm>
           <a:prstGeom prst="rect">
             <a:avLst/>
@@ -12087,7 +12087,7 @@
         </p:nvSpPr>
         <p:spPr>
           <a:xfrm>
-            <a:off x="4572000" y="3013976"/>
+            <a:off x="4572000" y="3753627"/>
             <a:ext cx="4114800" cy="274320"/>
           </a:xfrm>
           <a:prstGeom prst="rect">
@@ -12933,8 +12933,8 @@
         </p:blipFill>
         <p:spPr>
           <a:xfrm>
-            <a:off x="1250866" y="960120"/>
-            <a:ext cx="2253147" cy="3657600"/>
+            <a:off x="1140116" y="960120"/>
+            <a:ext cx="2474649" cy="3657600"/>
           </a:xfrm>
           <a:prstGeom prst="rect">
             <a:avLst/>
@@ -14455,7 +14455,7 @@
                           <a:ea typeface="Calibri" pitchFamily="34" charset="-122"/>
                           <a:cs typeface="Calibri" pitchFamily="34" charset="-120"/>
                         </a:rPr>
-                        <a:t>11</a:t>
+                        <a:t>12</a:t>
                       </a:r>
                       <a:endParaRPr lang="en-US" sz="950" dirty="0">
                         <a:latin typeface="Calibri" charset="0"/>
@@ -14520,7 +14520,7 @@
                           <a:ea typeface="Calibri" pitchFamily="34" charset="-122"/>
                           <a:cs typeface="Calibri" pitchFamily="34" charset="-120"/>
                         </a:rPr>
-                        <a:t>45 %</a:t>
+                        <a:t>42 %</a:t>
                       </a:r>
                       <a:endParaRPr lang="en-US" sz="950" dirty="0">
                         <a:latin typeface="Calibri" charset="0"/>
@@ -14782,7 +14782,7 @@
                           <a:ea typeface="Calibri" pitchFamily="34" charset="-122"/>
                           <a:cs typeface="Calibri" pitchFamily="34" charset="-120"/>
                         </a:rPr>
-                        <a:t>12</a:t>
+                        <a:t>11</a:t>
                       </a:r>
                       <a:endParaRPr lang="en-US" sz="950" dirty="0">
                         <a:latin typeface="Calibri" charset="0"/>
@@ -14847,7 +14847,7 @@
                           <a:ea typeface="Calibri" pitchFamily="34" charset="-122"/>
                           <a:cs typeface="Calibri" pitchFamily="34" charset="-120"/>
                         </a:rPr>
-                        <a:t>67 %</a:t>
+                        <a:t>64 %</a:t>
                       </a:r>
                       <a:endParaRPr lang="en-US" sz="950" dirty="0">
                         <a:latin typeface="Calibri" charset="0"/>
@@ -15436,7 +15436,7 @@
                           <a:ea typeface="Calibri" pitchFamily="34" charset="-122"/>
                           <a:cs typeface="Calibri" pitchFamily="34" charset="-120"/>
                         </a:rPr>
-                        <a:t>13</a:t>
+                        <a:t>14</a:t>
                       </a:r>
                       <a:endParaRPr lang="en-US" sz="950" dirty="0">
                         <a:latin typeface="Calibri" charset="0"/>
@@ -15501,7 +15501,7 @@
                           <a:ea typeface="Calibri" pitchFamily="34" charset="-122"/>
                           <a:cs typeface="Calibri" pitchFamily="34" charset="-120"/>
                         </a:rPr>
-                        <a:t>62 %</a:t>
+                        <a:t>64 %</a:t>
                       </a:r>
                       <a:endParaRPr lang="en-US" sz="950" dirty="0">
                         <a:latin typeface="Calibri" charset="0"/>
@@ -15763,7 +15763,7 @@
                           <a:ea typeface="Calibri" pitchFamily="34" charset="-122"/>
                           <a:cs typeface="Calibri" pitchFamily="34" charset="-120"/>
                         </a:rPr>
-                        <a:t>11</a:t>
+                        <a:t>10</a:t>
                       </a:r>
                       <a:endParaRPr lang="en-US" sz="950" dirty="0">
                         <a:latin typeface="Calibri" charset="0"/>
@@ -15828,7 +15828,7 @@
                           <a:ea typeface="Calibri" pitchFamily="34" charset="-122"/>
                           <a:cs typeface="Calibri" pitchFamily="34" charset="-120"/>
                         </a:rPr>
-                        <a:t>36 %</a:t>
+                        <a:t>30 %</a:t>
                       </a:r>
                       <a:endParaRPr lang="en-US" sz="950" dirty="0">
                         <a:latin typeface="Calibri" charset="0"/>
@@ -16090,7 +16090,7 @@
                           <a:ea typeface="Calibri" pitchFamily="34" charset="-122"/>
                           <a:cs typeface="Calibri" pitchFamily="34" charset="-120"/>
                         </a:rPr>
-                        <a:t>13</a:t>
+                        <a:t>15</a:t>
                       </a:r>
                       <a:endParaRPr lang="en-US" sz="950" dirty="0">
                         <a:latin typeface="Calibri" charset="0"/>
@@ -16155,7 +16155,7 @@
                           <a:ea typeface="Calibri" pitchFamily="34" charset="-122"/>
                           <a:cs typeface="Calibri" pitchFamily="34" charset="-120"/>
                         </a:rPr>
-                        <a:t>69 %</a:t>
+                        <a:t>73 %</a:t>
                       </a:r>
                       <a:endParaRPr lang="en-US" sz="950" dirty="0">
                         <a:latin typeface="Calibri" charset="0"/>
@@ -16417,7 +16417,7 @@
                           <a:ea typeface="Calibri" pitchFamily="34" charset="-122"/>
                           <a:cs typeface="Calibri" pitchFamily="34" charset="-120"/>
                         </a:rPr>
-                        <a:t>14</a:t>
+                        <a:t>15</a:t>
                       </a:r>
                       <a:endParaRPr lang="en-US" sz="950" dirty="0">
                         <a:latin typeface="Calibri" charset="0"/>
@@ -16482,7 +16482,7 @@
                           <a:ea typeface="Calibri" pitchFamily="34" charset="-122"/>
                           <a:cs typeface="Calibri" pitchFamily="34" charset="-120"/>
                         </a:rPr>
-                        <a:t>57 %</a:t>
+                        <a:t>53 %</a:t>
                       </a:r>
                       <a:endParaRPr lang="en-US" sz="950" dirty="0">
                         <a:latin typeface="Calibri" charset="0"/>
@@ -16744,7 +16744,7 @@
                           <a:ea typeface="Calibri" pitchFamily="34" charset="-122"/>
                           <a:cs typeface="Calibri" pitchFamily="34" charset="-120"/>
                         </a:rPr>
-                        <a:t>10</a:t>
+                        <a:t>11</a:t>
                       </a:r>
                       <a:endParaRPr lang="en-US" sz="950" dirty="0">
                         <a:latin typeface="Calibri" charset="0"/>
@@ -16809,7 +16809,7 @@
                           <a:ea typeface="Calibri" pitchFamily="34" charset="-122"/>
                           <a:cs typeface="Calibri" pitchFamily="34" charset="-120"/>
                         </a:rPr>
-                        <a:t>60 %</a:t>
+                        <a:t>73 %</a:t>
                       </a:r>
                       <a:endParaRPr lang="en-US" sz="950" dirty="0">
                         <a:latin typeface="Calibri" charset="0"/>
@@ -16895,7 +16895,7 @@
                 <a:ea typeface="Calibri" pitchFamily="34" charset="-122"/>
                 <a:cs typeface="Calibri" pitchFamily="34" charset="-120"/>
               </a:rPr>
-              <a:t>121</a:t>
+              <a:t>125</a:t>
             </a:r>
             <a:endParaRPr lang="en-US" sz="4000" dirty="0"/>
           </a:p>
@@ -16934,7 +16934,7 @@
                 <a:ea typeface="Calibri" pitchFamily="34" charset="-122"/>
                 <a:cs typeface="Calibri" pitchFamily="34" charset="-120"/>
               </a:rPr>
-              <a:t>Aktivitäten im Werkstatt-Pool, im Schnitt 12,1 je Diagramm</a:t>
+              <a:t>Aktivitäten im Werkstatt-Pool, im Schnitt 12,5 je Diagramm</a:t>
             </a:r>
             <a:endParaRPr lang="en-US" sz="1100" dirty="0"/>
           </a:p>
@@ -16973,7 +16973,7 @@
                 <a:ea typeface="Calibri" pitchFamily="34" charset="-122"/>
                 <a:cs typeface="Calibri" pitchFamily="34" charset="-120"/>
               </a:rPr>
-              <a:t>61 %</a:t>
+              <a:t>62 %</a:t>
             </a:r>
             <a:endParaRPr lang="en-US" sz="4000" dirty="0"/>
           </a:p>
@@ -18050,8 +18050,8 @@
         </p:blipFill>
         <p:spPr>
           <a:xfrm>
-            <a:off x="1579418" y="960120"/>
-            <a:ext cx="5985164" cy="2468880"/>
+            <a:off x="2018537" y="960120"/>
+            <a:ext cx="5106927" cy="2468880"/>
           </a:xfrm>
           <a:prstGeom prst="rect">
             <a:avLst/>
@@ -18091,7 +18091,7 @@
                 <a:ea typeface="Calibri" pitchFamily="34" charset="-122"/>
                 <a:cs typeface="Calibri" pitchFamily="34" charset="-120"/>
               </a:rPr>
-              <a:t>Ausschnitt Pool Kunde und Lane Service / Annahme: Aufnahme und Anfrage, Medienprüfung mit Rückfrage an den Kunden, KI-Diagnosevorschlag, Vorab-KVA</a:t>
+              <a:t>Ausschnitt Pool Kunde und Lane Service / Annahme: Aufnahme und Anfrage, Voranmeldung anlegen, Medienprüfung mit Rückfrage an den Kunden, KI-Diagnosevorschlag, Vorab-KVA</a:t>
             </a:r>
             <a:endParaRPr lang="en-US" sz="900" dirty="0"/>
           </a:p>
@@ -18134,7 +18134,7 @@
                 <a:ea typeface="Calibri" pitchFamily="34" charset="-122"/>
                 <a:cs typeface="Calibri" pitchFamily="34" charset="-120"/>
               </a:rPr>
-              <a:t>Kunde: Foto, Video oder Ton aufnehmen und in der App senden; Auslöser für die Werkstatt ist diese Nachricht</a:t>
+              <a:t>Kunde: Foto, Video oder Ton aufnehmen und in der App senden; RepairFlow legt daraus sofort die Voranmeldung an</a:t>
             </a:r>
             <a:endParaRPr lang="en-US" sz="1100" dirty="0"/>
           </a:p>
@@ -18155,7 +18155,7 @@
                 <a:ea typeface="Calibri" pitchFamily="34" charset="-122"/>
                 <a:cs typeface="Calibri" pitchFamily="34" charset="-120"/>
               </a:rPr>
-              <a:t>Rückfrageschleife bei nicht auswertbaren Medien</a:t>
+              <a:t>Rückfrage bei nicht auswertbaren Medien: neue Aufnahme oder nach 7 Tagen verwerfen</a:t>
             </a:r>
             <a:endParaRPr lang="en-US" sz="1100" dirty="0"/>
           </a:p>
@@ -18197,7 +18197,7 @@
                 <a:ea typeface="Calibri" pitchFamily="34" charset="-122"/>
                 <a:cs typeface="Calibri" pitchFamily="34" charset="-120"/>
               </a:rPr>
-              <a:t>Warten auf Bestätigung oder 7-Tage-Timer, dann Voranmeldung mit Vorreservierung</a:t>
+              <a:t>Warten auf Bestätigung (Vorreservierung), Ablehnung oder 7-Tage-Timer (Voranmeldung verwerfen)</a:t>
             </a:r>
             <a:endParaRPr lang="en-US" sz="1100" dirty="0"/>
           </a:p>

--- a/praesi/Abschlusspraesentation.pptx
+++ b/praesi/Abschlusspraesentation.pptx
@@ -4554,8 +4554,8 @@
         </p:blipFill>
         <p:spPr>
           <a:xfrm>
-            <a:off x="1220020" y="960120"/>
-            <a:ext cx="3412120" cy="3749040"/>
+            <a:off x="589722" y="960120"/>
+            <a:ext cx="4672717" cy="3749040"/>
           </a:xfrm>
           <a:prstGeom prst="rect">
             <a:avLst/>
@@ -5493,8 +5493,8 @@
         </p:blipFill>
         <p:spPr>
           <a:xfrm>
-            <a:off x="1501631" y="960120"/>
-            <a:ext cx="3580418" cy="3749040"/>
+            <a:off x="1420193" y="960120"/>
+            <a:ext cx="3743294" cy="3749040"/>
           </a:xfrm>
           <a:prstGeom prst="rect">
             <a:avLst/>
@@ -5601,7 +5601,7 @@
                 <a:ea typeface="Calibri" pitchFamily="34" charset="-122"/>
                 <a:cs typeface="Calibri" pitchFamily="34" charset="-120"/>
               </a:rPr>
-              <a:t>Kunde über Reparaturbeginn informieren; erst danach Bestellung bei Bedarf (UC10)</a:t>
+              <a:t>Kunde über Reparaturbeginn informieren; danach Bestellung nur bei Fehlteilen (UC10)</a:t>
             </a:r>
             <a:endParaRPr lang="en-US" sz="1050" dirty="0"/>
           </a:p>
@@ -7588,7 +7588,7 @@
                 <a:ea typeface="Calibri" pitchFamily="34" charset="-122"/>
                 <a:cs typeface="Calibri" pitchFamily="34" charset="-120"/>
               </a:rPr>
-              <a:t>BPMN-Kollaborationsdiagramme, 130 Aktivitäten</a:t>
+              <a:t>BPMN-Kollaborationsdiagramme, 131 Aktivitäten</a:t>
             </a:r>
             <a:endParaRPr lang="en-US" sz="1100" dirty="0"/>
           </a:p>
@@ -15109,7 +15109,7 @@
                           <a:ea typeface="Calibri" pitchFamily="34" charset="-122"/>
                           <a:cs typeface="Calibri" pitchFamily="34" charset="-120"/>
                         </a:rPr>
-                        <a:t>13</a:t>
+                        <a:t>14</a:t>
                       </a:r>
                       <a:endParaRPr lang="en-US" sz="950" dirty="0">
                         <a:latin typeface="Calibri" charset="0"/>
@@ -15174,7 +15174,7 @@
                           <a:ea typeface="Calibri" pitchFamily="34" charset="-122"/>
                           <a:cs typeface="Calibri" pitchFamily="34" charset="-120"/>
                         </a:rPr>
-                        <a:t>77 %</a:t>
+                        <a:t>79 %</a:t>
                       </a:r>
                       <a:endParaRPr lang="en-US" sz="950" dirty="0">
                         <a:latin typeface="Calibri" charset="0"/>
@@ -15501,7 +15501,7 @@
                           <a:ea typeface="Calibri" pitchFamily="34" charset="-122"/>
                           <a:cs typeface="Calibri" pitchFamily="34" charset="-120"/>
                         </a:rPr>
-                        <a:t>64 %</a:t>
+                        <a:t>57 %</a:t>
                       </a:r>
                       <a:endParaRPr lang="en-US" sz="950" dirty="0">
                         <a:latin typeface="Calibri" charset="0"/>
@@ -16895,7 +16895,7 @@
                 <a:ea typeface="Calibri" pitchFamily="34" charset="-122"/>
                 <a:cs typeface="Calibri" pitchFamily="34" charset="-120"/>
               </a:rPr>
-              <a:t>130</a:t>
+              <a:t>131</a:t>
             </a:r>
             <a:endParaRPr lang="en-US" sz="4000" dirty="0"/>
           </a:p>
@@ -16934,7 +16934,7 @@
                 <a:ea typeface="Calibri" pitchFamily="34" charset="-122"/>
                 <a:cs typeface="Calibri" pitchFamily="34" charset="-120"/>
               </a:rPr>
-              <a:t>Aktivitäten im Werkstatt-Pool, im Schnitt 13,0 je Diagramm</a:t>
+              <a:t>Aktivitäten im Werkstatt-Pool, im Schnitt 13,1 je Diagramm</a:t>
             </a:r>
             <a:endParaRPr lang="en-US" sz="1100" dirty="0"/>
           </a:p>
@@ -16973,7 +16973,7 @@
                 <a:ea typeface="Calibri" pitchFamily="34" charset="-122"/>
                 <a:cs typeface="Calibri" pitchFamily="34" charset="-120"/>
               </a:rPr>
-              <a:t>61 %</a:t>
+              <a:t>60 %</a:t>
             </a:r>
             <a:endParaRPr lang="en-US" sz="4000" dirty="0"/>
           </a:p>

--- a/praesi/Abschlusspraesentation.pptx
+++ b/praesi/Abschlusspraesentation.pptx
@@ -1143,7 +1143,8 @@
           <a:p>
             <a:r>
               <a:rPr lang="en-US" dirty="0"/>
-              <a:t>Vortragende(r): David</a:t>
+              <a:t>Vortragende(r): David
+Scrum im Takt der Gruppentermine: Review, Retrospektive und Planning je Termin. Jede Änderung über Branch, Pull Request und Review; Merge durch Jakob als Qualitätsmanager. Abstimmung über WhatsApp, Dateien nur über GitHub.</a:t>
             </a:r>
             <a:endParaRPr lang="en-US" dirty="0"/>
           </a:p>
@@ -1231,7 +1232,8 @@
           <a:p>
             <a:r>
               <a:rPr lang="en-US" dirty="0"/>
-              <a:t>Vortragende(r): Jakob</a:t>
+              <a:t>Vortragende(r): Jakob
+Beispiel für die Konsistenzprüfung: Nach den Korrekturen an Prozess 07 (E-19) musste SD4 nachgezogen werden. Prüfrunden: Gesamtprüfung am 26.09., Komplettcheck am 05.10. mit 26 Befunden, QA-Checkliste mit Q1 bis Q8.</a:t>
             </a:r>
             <a:endParaRPr lang="en-US" dirty="0"/>
           </a:p>
@@ -1319,7 +1321,8 @@
           <a:p>
             <a:r>
               <a:rPr lang="en-US" dirty="0"/>
-              <a:t>Vortragende(r): Nina</a:t>
+              <a:t>Vortragende(r): Nina
+Kennzahlen kurz nennen, dann die zwei Kernaussagen. Der Ausblick ist Vision, nicht modelliert.</a:t>
             </a:r>
             <a:endParaRPr lang="en-US" dirty="0"/>
           </a:p>
@@ -1495,7 +1498,8 @@
           <a:p>
             <a:r>
               <a:rPr lang="en-US" dirty="0"/>
-              <a:t>Vortragende(r): Nina</a:t>
+              <a:t>Vortragende(r): Nina
+Kurz die sieben Teile und die Vortragenden nennen; Fragen bitte am Ende.</a:t>
             </a:r>
             <a:endParaRPr lang="en-US" dirty="0"/>
           </a:p>
@@ -1673,7 +1677,7 @@
             <a:r>
               <a:rPr lang="en-US" dirty="0"/>
               <a:t>Vortragende(r): David
-Pilotkunde FixWerk GmbH: vier Filialen, Fahrrad, E-Bike und Elektronik.</a:t>
+FixWerk GmbH ist ein fiktiver Pilotkunde mit vier Filialen in der Region Karlsruhe (Fahrrad, E-Bike, Elektronik). Die vier Probleme sind Annahmen unseres Szenarios, keine erhobenen Daten.</a:t>
             </a:r>
             <a:endParaRPr lang="en-US" dirty="0"/>
           </a:p>
@@ -1761,7 +1765,8 @@
           <a:p>
             <a:r>
               <a:rPr lang="en-US" dirty="0"/>
-              <a:t>Vortragende(r): Adrian</a:t>
+              <a:t>Vortragende(r): Adrian
+Rückfrage des Dozenten bei der Konzeptvorstellung: Betreiber oder Solution Provider? Wir sind der Softwareanbieter, FixWerk ist der Pilotkunde. Systemkontext: Buchhaltung, Lieferantensysteme und die physische Reparatur liegen außerhalb der Systemgrenze.</a:t>
             </a:r>
             <a:endParaRPr lang="en-US" dirty="0"/>
           </a:p>
@@ -1850,7 +1855,7 @@
             <a:r>
               <a:rPr lang="en-US" dirty="0"/>
               <a:t>Vortragende(r): Adrian
-Fahrrad: fixdesk, RO App, Repero. Elektronik: RepairDesk, RepairShopr. Stand der Recherche September 2026.</a:t>
+Die drei Merkmale beschreiben den Zuschnitt unseres Entwurfs. Einen belegten Funktionsvergleich mit bestehenden Werkstattlösungen haben wir nicht erstellt; deshalb nennen wir keine Wettbewerber.</a:t>
             </a:r>
             <a:endParaRPr lang="en-US" dirty="0"/>
           </a:p>
@@ -2027,7 +2032,8 @@
           <a:p>
             <a:r>
               <a:rPr lang="en-US" dirty="0"/>
-              <a:t>Vortragende(r): Maximilian</a:t>
+              <a:t>Vortragende(r): Maximilian
+Prozesse 01 bis 08 sind die Auftragsreise entlang des Zustandsautomaten, 09 und 10 die Folgeprozesse Reklamation und Retoure. Gezählt sind nur die Aktivitäten im Werkstatt-Pool; die 26 Aktivitäten der Kundenabläufe kommen hinzu.</a:t>
             </a:r>
             <a:endParaRPr lang="en-US" dirty="0"/>
           </a:p>
@@ -4554,8 +4560,8 @@
         </p:blipFill>
         <p:spPr>
           <a:xfrm>
-            <a:off x="589722" y="960120"/>
-            <a:ext cx="4672717" cy="3749040"/>
+            <a:off x="1212172" y="960120"/>
+            <a:ext cx="3427817" cy="3749040"/>
           </a:xfrm>
           <a:prstGeom prst="rect">
             <a:avLst/>
@@ -7053,7 +7059,7 @@
                 <a:ea typeface="Calibri" pitchFamily="34" charset="-122"/>
                 <a:cs typeface="Calibri" pitchFamily="34" charset="-120"/>
               </a:rPr>
-              <a:t>Datenobjekte, Klassen, Lebenslinien und Statuswerte müssen wortgleich sein. Eine gemeinsame Modellbeschreibung als Single Source of Truth hat die Abweichungen beseitigt.</a:t>
+              <a:t>Datenobjekte, Klassen, Lebenslinien und Statuswerte müssen wortgleich sein. Gemeinsame Namensregeln und ein Abgleich nach jeder Änderung (QA-Checkliste) halten die Modelle zusammen.</a:t>
             </a:r>
             <a:endParaRPr lang="en-US" sz="1150" dirty="0"/>
           </a:p>
@@ -11157,7 +11163,7 @@
                 <a:ea typeface="Calibri" pitchFamily="34" charset="-122"/>
                 <a:cs typeface="Calibri" pitchFamily="34" charset="-120"/>
               </a:rPr>
-              <a:t>Unabhängige Reparaturwerkstätten für Fahrräder, E-Bikes und Elektronik wachsen, ihre Abläufe nicht. Unser Pilotkunde FixWerk GmbH (vier Filialen) zeigt die typischen Probleme:</a:t>
+              <a:t>Unser Szenario: Die fiktive Werkstattkette FixWerk GmbH (vier Filialen, Fahrrad, E-Bike und Elektronik) arbeitet mit Papier, Excel-Listen und Telefon. Wir gehen von vier Problemen aus:</a:t>
             </a:r>
             <a:endParaRPr lang="en-US" sz="1300" dirty="0"/>
           </a:p>
@@ -12183,7 +12189,7 @@
                 <a:ea typeface="Calibri" pitchFamily="34" charset="-122"/>
                 <a:cs typeface="Calibri" pitchFamily="34" charset="-120"/>
               </a:rPr>
-              <a:t>Markt und Wettbewerb: drei Unterschiede</a:t>
+              <a:t>Unser Zuschnitt: drei Merkmale</a:t>
             </a:r>
             <a:endParaRPr lang="en-US" sz="2800" dirty="0"/>
           </a:p>
@@ -12300,7 +12306,7 @@
                 <a:ea typeface="Calibri" pitchFamily="34" charset="-122"/>
                 <a:cs typeface="Calibri" pitchFamily="34" charset="-120"/>
               </a:rPr>
-              <a:t>Werkstattsoftware gibt es, aber getrennt nach Welten: Fahrrad (fixdesk, RO App, Repero) oder Elektronik (RepairDesk, RepairShopr).</a:t>
+              <a:t>RepairFlow soll Fahrrad-, E-Bike- und Elektronikreparaturen gemeinsam abbilden. Drei Merkmale prägen unseren Entwurf:</a:t>
             </a:r>
             <a:endParaRPr lang="en-US" sz="1300" dirty="0"/>
           </a:p>

--- a/praesi/Abschlusspraesentation.pptx
+++ b/praesi/Abschlusspraesentation.pptx
@@ -1233,7 +1233,7 @@
             <a:r>
               <a:rPr lang="en-US" dirty="0"/>
               <a:t>Vortragende(r): Jakob
-Beispiel für die Konsistenzprüfung: Nach den Korrekturen an Prozess 07 (E-19) musste SD4 nachgezogen werden. Prüfrunden: Gesamtprüfung am 26.09., Komplettcheck am 05.10. mit 26 Befunden, QA-Checkliste mit Q1 bis Q8.</a:t>
+Beispiel für die Konsistenzprüfung: Nach den Korrekturen an Prozess 07 (E-19) musste SD4 nachgezogen werden. Prüfrunden: Gesamtprüfung am 26.09., Komplettcheck am 05.10. mit 39 Befunden, QA-Checkliste mit Q1 bis Q8.</a:t>
             </a:r>
             <a:endParaRPr lang="en-US" dirty="0"/>
           </a:p>
